--- a/slides/009_params_control_waterfall.pptx
+++ b/slides/009_params_control_waterfall.pptx
@@ -13,19 +13,21 @@
     <p:sldId id="266" r:id="rId7"/>
     <p:sldId id="267" r:id="rId8"/>
     <p:sldId id="259" r:id="rId9"/>
-    <p:sldId id="260" r:id="rId10"/>
-    <p:sldId id="268" r:id="rId11"/>
-    <p:sldId id="269" r:id="rId12"/>
-    <p:sldId id="271" r:id="rId13"/>
-    <p:sldId id="272" r:id="rId14"/>
-    <p:sldId id="270" r:id="rId15"/>
-    <p:sldId id="261" r:id="rId16"/>
-    <p:sldId id="262" r:id="rId17"/>
-    <p:sldId id="263" r:id="rId18"/>
-    <p:sldId id="264" r:id="rId19"/>
-    <p:sldId id="274" r:id="rId20"/>
-    <p:sldId id="265" r:id="rId21"/>
-    <p:sldId id="273" r:id="rId22"/>
+    <p:sldId id="277" r:id="rId10"/>
+    <p:sldId id="278" r:id="rId11"/>
+    <p:sldId id="260" r:id="rId12"/>
+    <p:sldId id="268" r:id="rId13"/>
+    <p:sldId id="269" r:id="rId14"/>
+    <p:sldId id="271" r:id="rId15"/>
+    <p:sldId id="272" r:id="rId16"/>
+    <p:sldId id="270" r:id="rId17"/>
+    <p:sldId id="261" r:id="rId18"/>
+    <p:sldId id="262" r:id="rId19"/>
+    <p:sldId id="263" r:id="rId20"/>
+    <p:sldId id="264" r:id="rId21"/>
+    <p:sldId id="274" r:id="rId22"/>
+    <p:sldId id="265" r:id="rId23"/>
+    <p:sldId id="273" r:id="rId24"/>
   </p:sldIdLst>
   <p:sldSz cx="12192000" cy="6858000"/>
   <p:notesSz cx="6858000" cy="9144000"/>
@@ -124,6 +126,11 @@
       </a:defRPr>
     </a:lvl9pPr>
   </p:defaultTextStyle>
+  <p:extLst>
+    <p:ext uri="{EFAFB233-063F-42B5-8137-9DF3F51BA10A}">
+      <p15:sldGuideLst xmlns:p15="http://schemas.microsoft.com/office/powerpoint/2012/main"/>
+    </p:ext>
+  </p:extLst>
 </p:presentation>
 </file>
 
@@ -11118,7 +11125,10 @@
           <a:bodyPr/>
           <a:lstStyle/>
           <a:p>
-            <a:endParaRPr lang="en-US"/>
+            <a:r>
+              <a:rPr lang="en-US" dirty="0"/>
+              <a:t>Parameters, Control Charts, Waterfall Charts</a:t>
+            </a:r>
           </a:p>
         </p:txBody>
       </p:sp>
@@ -11182,7 +11192,7 @@
           <p:cNvPr id="2" name="Title 1">
             <a:extLst>
               <a:ext uri="{FF2B5EF4-FFF2-40B4-BE49-F238E27FC236}">
-                <a16:creationId xmlns:a16="http://schemas.microsoft.com/office/drawing/2014/main" id="{07FF016D-327C-32DC-89BC-118D12F903AB}"/>
+                <a16:creationId xmlns:a16="http://schemas.microsoft.com/office/drawing/2014/main" id="{9598BA11-12EE-C5AA-5F44-3A356458C9C4}"/>
               </a:ext>
             </a:extLst>
           </p:cNvPr>
@@ -11200,7 +11210,7 @@
           <a:p>
             <a:r>
               <a:rPr lang="en-US" dirty="0"/>
-              <a:t>Waterfall Chart Pieces</a:t>
+              <a:t>Even More Dynamic?</a:t>
             </a:r>
           </a:p>
         </p:txBody>
@@ -11210,7 +11220,7 @@
           <p:cNvPr id="3" name="Content Placeholder 2">
             <a:extLst>
               <a:ext uri="{FF2B5EF4-FFF2-40B4-BE49-F238E27FC236}">
-                <a16:creationId xmlns:a16="http://schemas.microsoft.com/office/drawing/2014/main" id="{AA55B5BC-8DE0-E066-3A50-E63CF6875BC5}"/>
+                <a16:creationId xmlns:a16="http://schemas.microsoft.com/office/drawing/2014/main" id="{BB863855-4EC9-BFE3-EEB2-B65C3722D9D6}"/>
               </a:ext>
             </a:extLst>
           </p:cNvPr>
@@ -11223,8 +11233,8 @@
         </p:nvSpPr>
         <p:spPr>
           <a:xfrm>
-            <a:off x="5079999" y="1839433"/>
-            <a:ext cx="7009219" cy="4337530"/>
+            <a:off x="5620804" y="2004291"/>
+            <a:ext cx="6571196" cy="4172672"/>
           </a:xfrm>
         </p:spPr>
         <p:txBody>
@@ -11233,64 +11243,52 @@
           <a:p>
             <a:r>
               <a:rPr lang="en-US" dirty="0"/>
-              <a:t>A waterfall chart has a few basic components. </a:t>
+              <a:t>We can combine another feature to help more – window function. </a:t>
+            </a:r>
+          </a:p>
+          <a:p>
+            <a:r>
+              <a:rPr lang="en-US" dirty="0"/>
+              <a:t>Window functions calculate aggregation for what’s in window. </a:t>
             </a:r>
           </a:p>
           <a:p>
             <a:pPr lvl="1"/>
             <a:r>
               <a:rPr lang="en-US" dirty="0"/>
-              <a:t>The value – where the mark is on the Y axis. </a:t>
+              <a:t>I.e. whatever is visible based on filters/calculations.</a:t>
             </a:r>
           </a:p>
           <a:p>
             <a:pPr lvl="1"/>
             <a:r>
               <a:rPr lang="en-US" dirty="0"/>
-              <a:t>The change – difference between previous value and this value, shown by size of mark. </a:t>
-            </a:r>
+              <a:t>Regular avg/median/std… do all data, which may be confusing. </a:t>
+            </a:r>
+          </a:p>
+          <a:p>
+            <a:r>
+              <a:rPr lang="en-US" dirty="0"/>
+              <a:t>Stock data goes for years, we can make everything reactive to what we are looking at </a:t>
+            </a:r>
+            <a:r>
+              <a:rPr lang="en-US" i="1" dirty="0"/>
+              <a:t>now.</a:t>
+            </a:r>
+            <a:endParaRPr lang="en-US" dirty="0"/>
           </a:p>
           <a:p>
             <a:pPr lvl="1"/>
-            <a:r>
-              <a:rPr lang="en-US" dirty="0"/>
-              <a:t>The x-axis – usually time, but could be other thing (e.g. product type). </a:t>
-            </a:r>
-          </a:p>
-          <a:p>
-            <a:r>
-              <a:rPr lang="en-US" dirty="0"/>
-              <a:t>The change is signified by size and color of mark:</a:t>
-            </a:r>
-          </a:p>
-          <a:p>
-            <a:pPr lvl="1"/>
-            <a:r>
-              <a:rPr lang="en-US" dirty="0"/>
-              <a:t>Normally have discreet color for up/down. </a:t>
-            </a:r>
-          </a:p>
-          <a:p>
-            <a:pPr lvl="1"/>
-            <a:r>
-              <a:rPr lang="en-US" dirty="0"/>
-              <a:t>Size of bar “goes from” start to finish of time period. </a:t>
-            </a:r>
-          </a:p>
-          <a:p>
-            <a:r>
-              <a:rPr lang="en-US" dirty="0"/>
-              <a:t>Sometimes have start/end total bars. </a:t>
-            </a:r>
+            <a:endParaRPr lang="en-US" dirty="0"/>
           </a:p>
         </p:txBody>
       </p:sp>
       <p:pic>
         <p:nvPicPr>
-          <p:cNvPr id="4" name="Picture 3" descr="Waterfall Charts in PowerPoint">
-            <a:extLst>
-              <a:ext uri="{FF2B5EF4-FFF2-40B4-BE49-F238E27FC236}">
-                <a16:creationId xmlns:a16="http://schemas.microsoft.com/office/drawing/2014/main" id="{DC0E5B41-6BB6-FF6A-CB85-5CC835E17C81}"/>
+          <p:cNvPr id="4" name="Picture 3" descr="Tableau Window Functions | How does window functions work in tableau?">
+            <a:extLst>
+              <a:ext uri="{FF2B5EF4-FFF2-40B4-BE49-F238E27FC236}">
+                <a16:creationId xmlns:a16="http://schemas.microsoft.com/office/drawing/2014/main" id="{DE91066F-5A6D-E870-F6C6-1CB3A43665D3}"/>
               </a:ext>
             </a:extLst>
           </p:cNvPr>
@@ -11307,8 +11305,8 @@
         </p:blipFill>
         <p:spPr>
           <a:xfrm>
-            <a:off x="0" y="2661877"/>
-            <a:ext cx="5080000" cy="2857500"/>
+            <a:off x="0" y="2353486"/>
+            <a:ext cx="5620804" cy="3026587"/>
           </a:xfrm>
           <a:prstGeom prst="rect">
             <a:avLst/>
@@ -11318,7 +11316,7 @@
     </p:spTree>
     <p:extLst>
       <p:ext uri="{BB962C8B-B14F-4D97-AF65-F5344CB8AC3E}">
-        <p14:creationId xmlns:p14="http://schemas.microsoft.com/office/powerpoint/2010/main" val="2389332759"/>
+        <p14:creationId xmlns:p14="http://schemas.microsoft.com/office/powerpoint/2010/main" val="91575330"/>
       </p:ext>
     </p:extLst>
   </p:cSld>
@@ -11350,7 +11348,7 @@
           <p:cNvPr id="2" name="Title 1">
             <a:extLst>
               <a:ext uri="{FF2B5EF4-FFF2-40B4-BE49-F238E27FC236}">
-                <a16:creationId xmlns:a16="http://schemas.microsoft.com/office/drawing/2014/main" id="{AB78CD89-1BA3-FDE0-9269-C32F25A91C3B}"/>
+                <a16:creationId xmlns:a16="http://schemas.microsoft.com/office/drawing/2014/main" id="{5402F61E-C7B6-0DD9-D2DA-7076590C1542}"/>
               </a:ext>
             </a:extLst>
           </p:cNvPr>
@@ -11368,7 +11366,7 @@
           <a:p>
             <a:r>
               <a:rPr lang="en-US" dirty="0"/>
-              <a:t>Waterfall Requirements – Table Calculations</a:t>
+              <a:t>Waterfall (Candlestick) Chart</a:t>
             </a:r>
           </a:p>
         </p:txBody>
@@ -11378,7 +11376,7 @@
           <p:cNvPr id="3" name="Content Placeholder 2">
             <a:extLst>
               <a:ext uri="{FF2B5EF4-FFF2-40B4-BE49-F238E27FC236}">
-                <a16:creationId xmlns:a16="http://schemas.microsoft.com/office/drawing/2014/main" id="{900CA7B7-36C1-3E95-69FF-F712ED27BB74}"/>
+                <a16:creationId xmlns:a16="http://schemas.microsoft.com/office/drawing/2014/main" id="{FAA2D161-CBC3-29B3-3C0C-10AFE6D394E6}"/>
               </a:ext>
             </a:extLst>
           </p:cNvPr>
@@ -11391,82 +11389,74 @@
         </p:nvSpPr>
         <p:spPr>
           <a:xfrm>
-            <a:off x="114078" y="1865870"/>
-            <a:ext cx="6909246" cy="4631909"/>
-          </a:xfrm>
-        </p:spPr>
-        <p:txBody>
-          <a:bodyPr>
-            <a:normAutofit/>
-          </a:bodyPr>
+            <a:off x="685800" y="2004291"/>
+            <a:ext cx="4919921" cy="4172672"/>
+          </a:xfrm>
+        </p:spPr>
+        <p:txBody>
+          <a:bodyPr/>
           <a:lstStyle/>
           <a:p>
             <a:r>
               <a:rPr lang="en-US" dirty="0"/>
-              <a:t>Table calculations allow us to do more complex math in some ways. </a:t>
-            </a:r>
-          </a:p>
-          <a:p>
-            <a:r>
-              <a:rPr lang="en-US" dirty="0"/>
-              <a:t>Table calculations are based on the aggregates in the visualization. </a:t>
+              <a:t>Waterfall charts show two things:</a:t>
             </a:r>
           </a:p>
           <a:p>
             <a:pPr lvl="1"/>
             <a:r>
               <a:rPr lang="en-US" dirty="0"/>
-              <a:t>Remember – what do we want and how do we want it aggregated. </a:t>
+              <a:t>A value, similar to a line chart. </a:t>
             </a:r>
           </a:p>
           <a:p>
             <a:pPr lvl="1"/>
             <a:r>
               <a:rPr lang="en-US" dirty="0"/>
-              <a:t>A table calc takes those agrégations and calculates them. </a:t>
-            </a:r>
-          </a:p>
-          <a:p>
-            <a:r>
-              <a:rPr lang="en-US" dirty="0"/>
-              <a:t>Examples:</a:t>
+              <a:t>The per period (e.g. daily) change. </a:t>
+            </a:r>
+          </a:p>
+          <a:p>
+            <a:r>
+              <a:rPr lang="en-US" dirty="0"/>
+              <a:t>Good application of data density. </a:t>
             </a:r>
           </a:p>
           <a:p>
             <a:pPr lvl="1"/>
             <a:r>
               <a:rPr lang="en-US" dirty="0"/>
-              <a:t>Ranking of profit by location – aggregate profits by location, then rank the aggregates. </a:t>
+              <a:t>Change is added to a ”regular” line chart. </a:t>
+            </a:r>
+          </a:p>
+          <a:p>
+            <a:r>
+              <a:rPr lang="en-US" dirty="0"/>
+              <a:t>Commonly seen in:</a:t>
             </a:r>
           </a:p>
           <a:p>
             <a:pPr lvl="1"/>
             <a:r>
               <a:rPr lang="en-US" dirty="0"/>
-              <a:t>Moving average – average together previous N aggregated values. </a:t>
+              <a:t>Stock price quotes. </a:t>
             </a:r>
           </a:p>
           <a:p>
             <a:pPr lvl="1"/>
             <a:r>
               <a:rPr lang="en-US" dirty="0"/>
-              <a:t>Percentage of total – aggregate total sales, then convert to percent. </a:t>
-            </a:r>
-          </a:p>
-          <a:p>
-            <a:r>
-              <a:rPr lang="en-US" dirty="0"/>
-              <a:t>Also frequently seen in trying to do “fancy” stuff. </a:t>
+              <a:t>Summary of things like sales/profit totals. </a:t>
             </a:r>
           </a:p>
         </p:txBody>
       </p:sp>
       <p:pic>
         <p:nvPicPr>
-          <p:cNvPr id="4" name="Picture 3" descr="Quick Table Calculations - Tableau">
-            <a:extLst>
-              <a:ext uri="{FF2B5EF4-FFF2-40B4-BE49-F238E27FC236}">
-                <a16:creationId xmlns:a16="http://schemas.microsoft.com/office/drawing/2014/main" id="{AD8E5CBE-2548-25AE-B478-8A65D089620D}"/>
+          <p:cNvPr id="4" name="Picture 3" descr="Build Insightful Waterfall Charts in PowerPoint - Ampler">
+            <a:extLst>
+              <a:ext uri="{FF2B5EF4-FFF2-40B4-BE49-F238E27FC236}">
+                <a16:creationId xmlns:a16="http://schemas.microsoft.com/office/drawing/2014/main" id="{0049D6A1-47F6-2E35-0C63-861953723D56}"/>
               </a:ext>
             </a:extLst>
           </p:cNvPr>
@@ -11483,8 +11473,8 @@
         </p:blipFill>
         <p:spPr>
           <a:xfrm>
-            <a:off x="7023323" y="2004291"/>
-            <a:ext cx="5054600" cy="3263900"/>
+            <a:off x="5605721" y="2004291"/>
+            <a:ext cx="6502400" cy="3556000"/>
           </a:xfrm>
           <a:prstGeom prst="rect">
             <a:avLst/>
@@ -11494,7 +11484,7 @@
     </p:spTree>
     <p:extLst>
       <p:ext uri="{BB962C8B-B14F-4D97-AF65-F5344CB8AC3E}">
-        <p14:creationId xmlns:p14="http://schemas.microsoft.com/office/powerpoint/2010/main" val="3344436690"/>
+        <p14:creationId xmlns:p14="http://schemas.microsoft.com/office/powerpoint/2010/main" val="943217934"/>
       </p:ext>
     </p:extLst>
   </p:cSld>
@@ -11526,7 +11516,7 @@
           <p:cNvPr id="2" name="Title 1">
             <a:extLst>
               <a:ext uri="{FF2B5EF4-FFF2-40B4-BE49-F238E27FC236}">
-                <a16:creationId xmlns:a16="http://schemas.microsoft.com/office/drawing/2014/main" id="{EAA58659-2229-1A60-9592-54C79A680AE8}"/>
+                <a16:creationId xmlns:a16="http://schemas.microsoft.com/office/drawing/2014/main" id="{07FF016D-327C-32DC-89BC-118D12F903AB}"/>
               </a:ext>
             </a:extLst>
           </p:cNvPr>
@@ -11544,7 +11534,7 @@
           <a:p>
             <a:r>
               <a:rPr lang="en-US" dirty="0"/>
-              <a:t>Table Calculation Previewer</a:t>
+              <a:t>Waterfall Chart Pieces</a:t>
             </a:r>
           </a:p>
         </p:txBody>
@@ -11554,7 +11544,7 @@
           <p:cNvPr id="3" name="Content Placeholder 2">
             <a:extLst>
               <a:ext uri="{FF2B5EF4-FFF2-40B4-BE49-F238E27FC236}">
-                <a16:creationId xmlns:a16="http://schemas.microsoft.com/office/drawing/2014/main" id="{426AAB01-38EE-4A6E-AE23-F42F49CA2F54}"/>
+                <a16:creationId xmlns:a16="http://schemas.microsoft.com/office/drawing/2014/main" id="{AA55B5BC-8DE0-E066-3A50-E63CF6875BC5}"/>
               </a:ext>
             </a:extLst>
           </p:cNvPr>
@@ -11567,8 +11557,8 @@
         </p:nvSpPr>
         <p:spPr>
           <a:xfrm>
-            <a:off x="685800" y="2004291"/>
-            <a:ext cx="5332228" cy="4172672"/>
+            <a:off x="5079999" y="1839433"/>
+            <a:ext cx="7009219" cy="4337530"/>
           </a:xfrm>
         </p:spPr>
         <p:txBody>
@@ -11577,30 +11567,64 @@
           <a:p>
             <a:r>
               <a:rPr lang="en-US" dirty="0"/>
-              <a:t>For simple things, the table calculation window gives us help. </a:t>
+              <a:t>A waterfall chart has a few basic components. </a:t>
             </a:r>
           </a:p>
           <a:p>
             <a:pPr lvl="1"/>
             <a:r>
               <a:rPr lang="en-US" dirty="0"/>
-              <a:t>We need to be ok with the parts of the data. </a:t>
-            </a:r>
-          </a:p>
-          <a:p>
-            <a:r>
-              <a:rPr lang="en-US" dirty="0"/>
-              <a:t>The way calculations are done are based on how the data is displayed in the visualization. </a:t>
+              <a:t>The value – where the mark is on the Y axis. </a:t>
+            </a:r>
+          </a:p>
+          <a:p>
+            <a:pPr lvl="1"/>
+            <a:r>
+              <a:rPr lang="en-US" dirty="0"/>
+              <a:t>The change – difference between previous value and this value, shown by size of mark. </a:t>
+            </a:r>
+          </a:p>
+          <a:p>
+            <a:pPr lvl="1"/>
+            <a:r>
+              <a:rPr lang="en-US" dirty="0"/>
+              <a:t>The x-axis – usually time, but could be other thing (e.g. product type). </a:t>
+            </a:r>
+          </a:p>
+          <a:p>
+            <a:r>
+              <a:rPr lang="en-US" dirty="0"/>
+              <a:t>The change is signified by size and color of mark:</a:t>
+            </a:r>
+          </a:p>
+          <a:p>
+            <a:pPr lvl="1"/>
+            <a:r>
+              <a:rPr lang="en-US" dirty="0"/>
+              <a:t>Normally have discreet color for up/down. </a:t>
+            </a:r>
+          </a:p>
+          <a:p>
+            <a:pPr lvl="1"/>
+            <a:r>
+              <a:rPr lang="en-US" dirty="0"/>
+              <a:t>Size of bar “goes from” start to finish of time period. </a:t>
+            </a:r>
+          </a:p>
+          <a:p>
+            <a:r>
+              <a:rPr lang="en-US" dirty="0"/>
+              <a:t>Sometimes have start/end total bars. </a:t>
             </a:r>
           </a:p>
         </p:txBody>
       </p:sp>
       <p:pic>
         <p:nvPicPr>
-          <p:cNvPr id="4" name="Picture 3" descr="Tableau Secrets: Understanding Table Calculations Scope and Direction –  Part 1 – Michael Sandberg's Data Visualization Blog">
-            <a:extLst>
-              <a:ext uri="{FF2B5EF4-FFF2-40B4-BE49-F238E27FC236}">
-                <a16:creationId xmlns:a16="http://schemas.microsoft.com/office/drawing/2014/main" id="{40AADAFA-A0B0-6286-602C-4FDF35305170}"/>
+          <p:cNvPr id="4" name="Picture 3" descr="Waterfall Charts in PowerPoint">
+            <a:extLst>
+              <a:ext uri="{FF2B5EF4-FFF2-40B4-BE49-F238E27FC236}">
+                <a16:creationId xmlns:a16="http://schemas.microsoft.com/office/drawing/2014/main" id="{DC0E5B41-6BB6-FF6A-CB85-5CC835E17C81}"/>
               </a:ext>
             </a:extLst>
           </p:cNvPr>
@@ -11611,15 +11635,14 @@
         </p:nvPicPr>
         <p:blipFill>
           <a:blip r:embed="rId2"/>
-          <a:srcRect l="17421" t="18875"/>
           <a:stretch>
             <a:fillRect/>
           </a:stretch>
         </p:blipFill>
         <p:spPr>
           <a:xfrm>
-            <a:off x="5912495" y="2004291"/>
-            <a:ext cx="6279505" cy="4172672"/>
+            <a:off x="0" y="2661877"/>
+            <a:ext cx="5080000" cy="2857500"/>
           </a:xfrm>
           <a:prstGeom prst="rect">
             <a:avLst/>
@@ -11629,7 +11652,7 @@
     </p:spTree>
     <p:extLst>
       <p:ext uri="{BB962C8B-B14F-4D97-AF65-F5344CB8AC3E}">
-        <p14:creationId xmlns:p14="http://schemas.microsoft.com/office/powerpoint/2010/main" val="622983566"/>
+        <p14:creationId xmlns:p14="http://schemas.microsoft.com/office/powerpoint/2010/main" val="2389332759"/>
       </p:ext>
     </p:extLst>
   </p:cSld>
@@ -11661,7 +11684,7 @@
           <p:cNvPr id="2" name="Title 1">
             <a:extLst>
               <a:ext uri="{FF2B5EF4-FFF2-40B4-BE49-F238E27FC236}">
-                <a16:creationId xmlns:a16="http://schemas.microsoft.com/office/drawing/2014/main" id="{8C60C220-3906-9AAC-04DC-D985EC8C1744}"/>
+                <a16:creationId xmlns:a16="http://schemas.microsoft.com/office/drawing/2014/main" id="{AB78CD89-1BA3-FDE0-9269-C32F25A91C3B}"/>
               </a:ext>
             </a:extLst>
           </p:cNvPr>
@@ -11679,7 +11702,7 @@
           <a:p>
             <a:r>
               <a:rPr lang="en-US" dirty="0"/>
-              <a:t>How to Calculate your Tables</a:t>
+              <a:t>Waterfall Requirements – Table Calculations</a:t>
             </a:r>
           </a:p>
         </p:txBody>
@@ -11689,7 +11712,7 @@
           <p:cNvPr id="3" name="Content Placeholder 2">
             <a:extLst>
               <a:ext uri="{FF2B5EF4-FFF2-40B4-BE49-F238E27FC236}">
-                <a16:creationId xmlns:a16="http://schemas.microsoft.com/office/drawing/2014/main" id="{572C4750-2F21-C441-F47F-B602DF29B0D6}"/>
+                <a16:creationId xmlns:a16="http://schemas.microsoft.com/office/drawing/2014/main" id="{900CA7B7-36C1-3E95-69FF-F712ED27BB74}"/>
               </a:ext>
             </a:extLst>
           </p:cNvPr>
@@ -11702,79 +11725,82 @@
         </p:nvSpPr>
         <p:spPr>
           <a:xfrm>
-            <a:off x="7888028" y="2004291"/>
-            <a:ext cx="4188344" cy="4172672"/>
+            <a:off x="114078" y="1865870"/>
+            <a:ext cx="6909246" cy="4631909"/>
           </a:xfrm>
         </p:spPr>
         <p:txBody>
           <a:bodyPr>
-            <a:normAutofit fontScale="92500"/>
+            <a:normAutofit/>
           </a:bodyPr>
           <a:lstStyle/>
           <a:p>
             <a:r>
               <a:rPr lang="en-US" dirty="0"/>
-              <a:t>The yellow highlight is one “thing”. </a:t>
+              <a:t>Table calculations allow us to do more complex math in some ways. </a:t>
+            </a:r>
+          </a:p>
+          <a:p>
+            <a:r>
+              <a:rPr lang="en-US" dirty="0"/>
+              <a:t>Table calculations are based on the aggregates in the visualization. </a:t>
             </a:r>
           </a:p>
           <a:p>
             <a:pPr lvl="1"/>
             <a:r>
               <a:rPr lang="en-US" dirty="0"/>
-              <a:t>An aggregate per “thing” is calculated. </a:t>
-            </a:r>
-          </a:p>
-          <a:p>
-            <a:r>
-              <a:rPr lang="en-US" dirty="0"/>
-              <a:t>We will need table calculations to do several things:</a:t>
+              <a:t>Remember – what do we want and how do we want it aggregated. </a:t>
             </a:r>
           </a:p>
           <a:p>
             <a:pPr lvl="1"/>
             <a:r>
               <a:rPr lang="en-US" dirty="0"/>
-              <a:t>Simple things – you should be able to do rank or similar on your own. </a:t>
+              <a:t>A table calc takes those agrégations and calculates them. </a:t>
+            </a:r>
+          </a:p>
+          <a:p>
+            <a:r>
+              <a:rPr lang="en-US" dirty="0"/>
+              <a:t>Examples:</a:t>
             </a:r>
           </a:p>
           <a:p>
             <a:pPr lvl="1"/>
             <a:r>
               <a:rPr lang="en-US" dirty="0"/>
-              <a:t>Complex things – as a step in some complex how-to, can you replicate/adapt. </a:t>
-            </a:r>
-          </a:p>
-          <a:p>
-            <a:r>
-              <a:rPr lang="en-US" dirty="0"/>
-              <a:t>Table calculations have some more things to (re)consider:</a:t>
+              <a:t>Ranking of profit by location – aggregate profits by location, then rank the aggregates. </a:t>
             </a:r>
           </a:p>
           <a:p>
             <a:pPr lvl="1"/>
             <a:r>
               <a:rPr lang="en-US" dirty="0"/>
-              <a:t>How do I want this thing aggregated. </a:t>
+              <a:t>Moving average – average together previous N aggregated values. </a:t>
             </a:r>
           </a:p>
           <a:p>
             <a:pPr lvl="1"/>
             <a:r>
               <a:rPr lang="en-US" dirty="0"/>
-              <a:t>I want an answer “for each”. </a:t>
-            </a:r>
-          </a:p>
-          <a:p>
-            <a:endParaRPr lang="en-US" dirty="0"/>
+              <a:t>Percentage of total – aggregate total sales, then convert to percent. </a:t>
+            </a:r>
+          </a:p>
+          <a:p>
+            <a:r>
+              <a:rPr lang="en-US" dirty="0"/>
+              <a:t>Also frequently seen in trying to do “fancy” stuff. </a:t>
+            </a:r>
           </a:p>
         </p:txBody>
       </p:sp>
       <p:pic>
         <p:nvPicPr>
-          <p:cNvPr id="4" name="Picture 3" descr="Table Calculation Types - Tableau">
-            <a:extLst>
-              <a:ext uri="{FF2B5EF4-FFF2-40B4-BE49-F238E27FC236}">
-                <a16:creationId xmlns:a16="http://schemas.microsoft.com/office/drawing/2014/main" id="{58572117-5D46-7104-0DA2-D06F42652B0A}"/>
+          <p:cNvPr id="4" name="Picture 3" descr="Quick Table Calculations - Tableau">
+            <a:extLst>
+              <a:ext uri="{FF2B5EF4-FFF2-40B4-BE49-F238E27FC236}">
+                <a16:creationId xmlns:a16="http://schemas.microsoft.com/office/drawing/2014/main" id="{AD8E5CBE-2548-25AE-B478-8A65D089620D}"/>
               </a:ext>
             </a:extLst>
           </p:cNvPr>
@@ -11791,8 +11817,8 @@
         </p:blipFill>
         <p:spPr>
           <a:xfrm>
-            <a:off x="115628" y="1939566"/>
-            <a:ext cx="7772400" cy="4237397"/>
+            <a:off x="7023323" y="2004291"/>
+            <a:ext cx="5054600" cy="3263900"/>
           </a:xfrm>
           <a:prstGeom prst="rect">
             <a:avLst/>
@@ -11802,7 +11828,7 @@
     </p:spTree>
     <p:extLst>
       <p:ext uri="{BB962C8B-B14F-4D97-AF65-F5344CB8AC3E}">
-        <p14:creationId xmlns:p14="http://schemas.microsoft.com/office/powerpoint/2010/main" val="4178888347"/>
+        <p14:creationId xmlns:p14="http://schemas.microsoft.com/office/powerpoint/2010/main" val="3344436690"/>
       </p:ext>
     </p:extLst>
   </p:cSld>
@@ -11834,7 +11860,7 @@
           <p:cNvPr id="2" name="Title 1">
             <a:extLst>
               <a:ext uri="{FF2B5EF4-FFF2-40B4-BE49-F238E27FC236}">
-                <a16:creationId xmlns:a16="http://schemas.microsoft.com/office/drawing/2014/main" id="{C0A5E119-E750-85A9-1015-D5529A82CEFB}"/>
+                <a16:creationId xmlns:a16="http://schemas.microsoft.com/office/drawing/2014/main" id="{EAA58659-2229-1A60-9592-54C79A680AE8}"/>
               </a:ext>
             </a:extLst>
           </p:cNvPr>
@@ -11852,7 +11878,7 @@
           <a:p>
             <a:r>
               <a:rPr lang="en-US" dirty="0"/>
-              <a:t>Tables and You!</a:t>
+              <a:t>Table Calculation Previewer</a:t>
             </a:r>
           </a:p>
         </p:txBody>
@@ -11862,7 +11888,7 @@
           <p:cNvPr id="3" name="Content Placeholder 2">
             <a:extLst>
               <a:ext uri="{FF2B5EF4-FFF2-40B4-BE49-F238E27FC236}">
-                <a16:creationId xmlns:a16="http://schemas.microsoft.com/office/drawing/2014/main" id="{C3F6444D-A898-DBB7-B472-2BE02C40A2F0}"/>
+                <a16:creationId xmlns:a16="http://schemas.microsoft.com/office/drawing/2014/main" id="{426AAB01-38EE-4A6E-AE23-F42F49CA2F54}"/>
               </a:ext>
             </a:extLst>
           </p:cNvPr>
@@ -11875,83 +11901,40 @@
         </p:nvSpPr>
         <p:spPr>
           <a:xfrm>
-            <a:off x="7219507" y="1853514"/>
-            <a:ext cx="4972493" cy="4644265"/>
-          </a:xfrm>
-        </p:spPr>
-        <p:txBody>
-          <a:bodyPr>
-            <a:normAutofit/>
-          </a:bodyPr>
+            <a:off x="685800" y="2004291"/>
+            <a:ext cx="5332228" cy="4172672"/>
+          </a:xfrm>
+        </p:spPr>
+        <p:txBody>
+          <a:bodyPr/>
           <a:lstStyle/>
           <a:p>
             <a:r>
               <a:rPr lang="en-US" dirty="0"/>
-              <a:t>The Specific Dimensions are complex:</a:t>
+              <a:t>For simple things, the table calculation window gives us help. </a:t>
             </a:r>
           </a:p>
           <a:p>
             <a:pPr lvl="1"/>
             <a:r>
               <a:rPr lang="en-US" dirty="0"/>
-              <a:t>Specify exactly how to calculate what we need. </a:t>
-            </a:r>
-          </a:p>
-          <a:p>
-            <a:pPr lvl="1"/>
-            <a:r>
-              <a:rPr lang="en-US" dirty="0"/>
-              <a:t>This is common in complex examples.</a:t>
-            </a:r>
-          </a:p>
-          <a:p>
-            <a:pPr lvl="1"/>
-            <a:r>
-              <a:rPr lang="en-US" dirty="0"/>
-              <a:t>May require T&amp;E to get – check 1. </a:t>
-            </a:r>
-          </a:p>
-          <a:p>
-            <a:r>
-              <a:rPr lang="en-US" dirty="0"/>
-              <a:t>For each segment, compute running sum, by quarter and year. </a:t>
-            </a:r>
-          </a:p>
-          <a:p>
-            <a:pPr lvl="1"/>
-            <a:r>
-              <a:rPr lang="en-US" dirty="0"/>
-              <a:t>Each unchecked thing gets a grouping. </a:t>
-            </a:r>
-          </a:p>
-          <a:p>
-            <a:pPr lvl="1"/>
-            <a:r>
-              <a:rPr lang="en-US" dirty="0"/>
-              <a:t>That value is calculated per q/year. </a:t>
-            </a:r>
-          </a:p>
-          <a:p>
-            <a:r>
-              <a:rPr lang="en-US" dirty="0"/>
-              <a:t>We can also have secondary calcs. </a:t>
-            </a:r>
-          </a:p>
-          <a:p>
-            <a:pPr lvl="1"/>
-            <a:r>
-              <a:rPr lang="en-US" dirty="0"/>
-              <a:t>Calculate totals then rank them. </a:t>
+              <a:t>We need to be ok with the parts of the data. </a:t>
+            </a:r>
+          </a:p>
+          <a:p>
+            <a:r>
+              <a:rPr lang="en-US" dirty="0"/>
+              <a:t>The way calculations are done are based on how the data is displayed in the visualization. </a:t>
             </a:r>
           </a:p>
         </p:txBody>
       </p:sp>
       <p:pic>
         <p:nvPicPr>
-          <p:cNvPr id="4" name="Picture 3" descr="Tables and Table Calculations | Springer Nature Link">
-            <a:extLst>
-              <a:ext uri="{FF2B5EF4-FFF2-40B4-BE49-F238E27FC236}">
-                <a16:creationId xmlns:a16="http://schemas.microsoft.com/office/drawing/2014/main" id="{7AFBCD0B-1D5F-7ED2-C7A4-8B489D53C9FB}"/>
+          <p:cNvPr id="4" name="Picture 3" descr="Tableau Secrets: Understanding Table Calculations Scope and Direction –  Part 1 – Michael Sandberg's Data Visualization Blog">
+            <a:extLst>
+              <a:ext uri="{FF2B5EF4-FFF2-40B4-BE49-F238E27FC236}">
+                <a16:creationId xmlns:a16="http://schemas.microsoft.com/office/drawing/2014/main" id="{40AADAFA-A0B0-6286-602C-4FDF35305170}"/>
               </a:ext>
             </a:extLst>
           </p:cNvPr>
@@ -11962,15 +11945,15 @@
         </p:nvPicPr>
         <p:blipFill>
           <a:blip r:embed="rId2"/>
-          <a:srcRect l="39574"/>
+          <a:srcRect l="17421" t="18875"/>
           <a:stretch>
             <a:fillRect/>
           </a:stretch>
         </p:blipFill>
         <p:spPr>
           <a:xfrm>
-            <a:off x="148855" y="1853514"/>
-            <a:ext cx="7070652" cy="4926866"/>
+            <a:off x="5912495" y="2004291"/>
+            <a:ext cx="6279505" cy="4172672"/>
           </a:xfrm>
           <a:prstGeom prst="rect">
             <a:avLst/>
@@ -11980,7 +11963,7 @@
     </p:spTree>
     <p:extLst>
       <p:ext uri="{BB962C8B-B14F-4D97-AF65-F5344CB8AC3E}">
-        <p14:creationId xmlns:p14="http://schemas.microsoft.com/office/powerpoint/2010/main" val="3714126364"/>
+        <p14:creationId xmlns:p14="http://schemas.microsoft.com/office/powerpoint/2010/main" val="622983566"/>
       </p:ext>
     </p:extLst>
   </p:cSld>
@@ -12012,7 +11995,7 @@
           <p:cNvPr id="2" name="Title 1">
             <a:extLst>
               <a:ext uri="{FF2B5EF4-FFF2-40B4-BE49-F238E27FC236}">
-                <a16:creationId xmlns:a16="http://schemas.microsoft.com/office/drawing/2014/main" id="{63FD5B3B-A751-5182-D937-379D3B7D4960}"/>
+                <a16:creationId xmlns:a16="http://schemas.microsoft.com/office/drawing/2014/main" id="{8C60C220-3906-9AAC-04DC-D985EC8C1744}"/>
               </a:ext>
             </a:extLst>
           </p:cNvPr>
@@ -12030,7 +12013,7 @@
           <a:p>
             <a:r>
               <a:rPr lang="en-US" dirty="0"/>
-              <a:t>Technical Stock Investing</a:t>
+              <a:t>How to Calculate your Tables</a:t>
             </a:r>
           </a:p>
         </p:txBody>
@@ -12040,7 +12023,7 @@
           <p:cNvPr id="3" name="Content Placeholder 2">
             <a:extLst>
               <a:ext uri="{FF2B5EF4-FFF2-40B4-BE49-F238E27FC236}">
-                <a16:creationId xmlns:a16="http://schemas.microsoft.com/office/drawing/2014/main" id="{2D2C15AE-F161-3078-B108-EA76C3CA0AA5}"/>
+                <a16:creationId xmlns:a16="http://schemas.microsoft.com/office/drawing/2014/main" id="{572C4750-2F21-C441-F47F-B602DF29B0D6}"/>
               </a:ext>
             </a:extLst>
           </p:cNvPr>
@@ -12053,59 +12036,66 @@
         </p:nvSpPr>
         <p:spPr>
           <a:xfrm>
-            <a:off x="5739416" y="2004291"/>
-            <a:ext cx="5461984" cy="4172672"/>
-          </a:xfrm>
-        </p:spPr>
-        <p:txBody>
-          <a:bodyPr/>
+            <a:off x="7888028" y="2004291"/>
+            <a:ext cx="4188344" cy="4172672"/>
+          </a:xfrm>
+        </p:spPr>
+        <p:txBody>
+          <a:bodyPr>
+            <a:normAutofit fontScale="92500"/>
+          </a:bodyPr>
           <a:lstStyle/>
           <a:p>
             <a:r>
               <a:rPr lang="en-US" dirty="0"/>
-              <a:t>Technical investing is based on patterns in stock price rather than value of underlying company. </a:t>
+              <a:t>The yellow highlight is one “thing”. </a:t>
             </a:r>
           </a:p>
           <a:p>
             <a:pPr lvl="1"/>
             <a:r>
               <a:rPr lang="en-US" dirty="0"/>
-              <a:t>We should invest because </a:t>
-            </a:r>
-            <a:r>
-              <a:rPr lang="en-US" i="1" dirty="0"/>
-              <a:t>based on patterns in price</a:t>
-            </a:r>
-            <a:r>
-              <a:rPr lang="en-US" dirty="0"/>
-              <a:t> it appears this stock will go up/down. </a:t>
+              <a:t>An aggregate per “thing” is calculated. </a:t>
+            </a:r>
+          </a:p>
+          <a:p>
+            <a:r>
+              <a:rPr lang="en-US" dirty="0"/>
+              <a:t>We will need table calculations to do several things:</a:t>
             </a:r>
           </a:p>
           <a:p>
             <a:pPr lvl="1"/>
             <a:r>
               <a:rPr lang="en-US" dirty="0"/>
-              <a:t>Rather than, we should invest because this is a good business that’ll grow in the future. </a:t>
-            </a:r>
-          </a:p>
-          <a:p>
-            <a:r>
-              <a:rPr lang="en-US" dirty="0"/>
-              <a:t>Based on looking at movement patterns in price. </a:t>
+              <a:t>Simple things – you should be able to do rank or similar on your own. </a:t>
             </a:r>
           </a:p>
           <a:p>
             <a:pPr lvl="1"/>
             <a:r>
               <a:rPr lang="en-US" dirty="0"/>
-              <a:t>The core idea is that stock prices move in repeatable patterns that we can follow if we notice them. </a:t>
+              <a:t>Complex things – as a step in some complex how-to, can you replicate/adapt. </a:t>
+            </a:r>
+          </a:p>
+          <a:p>
+            <a:r>
+              <a:rPr lang="en-US" dirty="0"/>
+              <a:t>Table calculations have some more things to (re)consider:</a:t>
             </a:r>
           </a:p>
           <a:p>
             <a:pPr lvl="1"/>
             <a:r>
               <a:rPr lang="en-US" dirty="0"/>
-              <a:t>Fast computers have made this more powerful. </a:t>
+              <a:t>How do I want this thing aggregated. </a:t>
+            </a:r>
+          </a:p>
+          <a:p>
+            <a:pPr lvl="1"/>
+            <a:r>
+              <a:rPr lang="en-US" dirty="0"/>
+              <a:t>I want an answer “for each”. </a:t>
             </a:r>
           </a:p>
           <a:p>
@@ -12115,10 +12105,10 @@
       </p:sp>
       <p:pic>
         <p:nvPicPr>
-          <p:cNvPr id="4" name="Picture 3" descr="Unlock Trading Insights with Key Stock Chart Patterns">
-            <a:extLst>
-              <a:ext uri="{FF2B5EF4-FFF2-40B4-BE49-F238E27FC236}">
-                <a16:creationId xmlns:a16="http://schemas.microsoft.com/office/drawing/2014/main" id="{752604EB-D45E-3B7F-41FF-F74FFC20A3BB}"/>
+          <p:cNvPr id="4" name="Picture 3" descr="Table Calculation Types - Tableau">
+            <a:extLst>
+              <a:ext uri="{FF2B5EF4-FFF2-40B4-BE49-F238E27FC236}">
+                <a16:creationId xmlns:a16="http://schemas.microsoft.com/office/drawing/2014/main" id="{58572117-5D46-7104-0DA2-D06F42652B0A}"/>
               </a:ext>
             </a:extLst>
           </p:cNvPr>
@@ -12129,15 +12119,14 @@
         </p:nvPicPr>
         <p:blipFill>
           <a:blip r:embed="rId2"/>
-          <a:srcRect b="10721"/>
           <a:stretch>
             <a:fillRect/>
           </a:stretch>
         </p:blipFill>
         <p:spPr>
           <a:xfrm>
-            <a:off x="164813" y="1905699"/>
-            <a:ext cx="5574603" cy="4592080"/>
+            <a:off x="115628" y="1939566"/>
+            <a:ext cx="7772400" cy="4237397"/>
           </a:xfrm>
           <a:prstGeom prst="rect">
             <a:avLst/>
@@ -12147,7 +12136,7 @@
     </p:spTree>
     <p:extLst>
       <p:ext uri="{BB962C8B-B14F-4D97-AF65-F5344CB8AC3E}">
-        <p14:creationId xmlns:p14="http://schemas.microsoft.com/office/powerpoint/2010/main" val="4275364864"/>
+        <p14:creationId xmlns:p14="http://schemas.microsoft.com/office/powerpoint/2010/main" val="4178888347"/>
       </p:ext>
     </p:extLst>
   </p:cSld>
@@ -12179,7 +12168,7 @@
           <p:cNvPr id="2" name="Title 1">
             <a:extLst>
               <a:ext uri="{FF2B5EF4-FFF2-40B4-BE49-F238E27FC236}">
-                <a16:creationId xmlns:a16="http://schemas.microsoft.com/office/drawing/2014/main" id="{FA81DE3C-9792-FBA1-115E-49BF23468997}"/>
+                <a16:creationId xmlns:a16="http://schemas.microsoft.com/office/drawing/2014/main" id="{C0A5E119-E750-85A9-1015-D5529A82CEFB}"/>
               </a:ext>
             </a:extLst>
           </p:cNvPr>
@@ -12197,7 +12186,7 @@
           <a:p>
             <a:r>
               <a:rPr lang="en-US" dirty="0"/>
-              <a:t>Patterns in Prices</a:t>
+              <a:t>Tables and You!</a:t>
             </a:r>
           </a:p>
         </p:txBody>
@@ -12207,7 +12196,7 @@
           <p:cNvPr id="3" name="Content Placeholder 2">
             <a:extLst>
               <a:ext uri="{FF2B5EF4-FFF2-40B4-BE49-F238E27FC236}">
-                <a16:creationId xmlns:a16="http://schemas.microsoft.com/office/drawing/2014/main" id="{AEA77AA2-69DE-12EE-6EE1-DF7BE5CAE0F6}"/>
+                <a16:creationId xmlns:a16="http://schemas.microsoft.com/office/drawing/2014/main" id="{C3F6444D-A898-DBB7-B472-2BE02C40A2F0}"/>
               </a:ext>
             </a:extLst>
           </p:cNvPr>
@@ -12220,33 +12209,83 @@
         </p:nvSpPr>
         <p:spPr>
           <a:xfrm>
-            <a:off x="685800" y="2004291"/>
-            <a:ext cx="5410200" cy="4172672"/>
-          </a:xfrm>
-        </p:spPr>
-        <p:txBody>
-          <a:bodyPr/>
+            <a:off x="7219507" y="1853514"/>
+            <a:ext cx="4972493" cy="4644265"/>
+          </a:xfrm>
+        </p:spPr>
+        <p:txBody>
+          <a:bodyPr>
+            <a:normAutofit/>
+          </a:bodyPr>
           <a:lstStyle/>
           <a:p>
             <a:r>
               <a:rPr lang="en-US" dirty="0"/>
-              <a:t>There are several patterns that people have noticed in how stock prices move. </a:t>
-            </a:r>
-          </a:p>
-          <a:p>
-            <a:r>
-              <a:rPr lang="en-US" dirty="0"/>
-              <a:t>Investors look for stocks at the start of the pattern, and invest assuming the stock may follow that pattern further. </a:t>
+              <a:t>The Specific Dimensions are complex:</a:t>
+            </a:r>
+          </a:p>
+          <a:p>
+            <a:pPr lvl="1"/>
+            <a:r>
+              <a:rPr lang="en-US" dirty="0"/>
+              <a:t>Specify exactly how to calculate what we need. </a:t>
+            </a:r>
+          </a:p>
+          <a:p>
+            <a:pPr lvl="1"/>
+            <a:r>
+              <a:rPr lang="en-US" dirty="0"/>
+              <a:t>This is common in complex examples.</a:t>
+            </a:r>
+          </a:p>
+          <a:p>
+            <a:pPr lvl="1"/>
+            <a:r>
+              <a:rPr lang="en-US" dirty="0"/>
+              <a:t>May require T&amp;E to get – check 1. </a:t>
+            </a:r>
+          </a:p>
+          <a:p>
+            <a:r>
+              <a:rPr lang="en-US" dirty="0"/>
+              <a:t>For each segment, compute running sum, by quarter and year. </a:t>
+            </a:r>
+          </a:p>
+          <a:p>
+            <a:pPr lvl="1"/>
+            <a:r>
+              <a:rPr lang="en-US" dirty="0"/>
+              <a:t>Each unchecked thing gets a grouping. </a:t>
+            </a:r>
+          </a:p>
+          <a:p>
+            <a:pPr lvl="1"/>
+            <a:r>
+              <a:rPr lang="en-US" dirty="0"/>
+              <a:t>That value is calculated per q/year. </a:t>
+            </a:r>
+          </a:p>
+          <a:p>
+            <a:r>
+              <a:rPr lang="en-US" dirty="0"/>
+              <a:t>We can also have secondary calcs. </a:t>
+            </a:r>
+          </a:p>
+          <a:p>
+            <a:pPr lvl="1"/>
+            <a:r>
+              <a:rPr lang="en-US" dirty="0"/>
+              <a:t>Calculate totals then rank them. </a:t>
             </a:r>
           </a:p>
         </p:txBody>
       </p:sp>
       <p:pic>
         <p:nvPicPr>
-          <p:cNvPr id="4" name="Picture 3" descr="10 important stock chart analysis patterns | CMC Markets">
-            <a:extLst>
-              <a:ext uri="{FF2B5EF4-FFF2-40B4-BE49-F238E27FC236}">
-                <a16:creationId xmlns:a16="http://schemas.microsoft.com/office/drawing/2014/main" id="{C8AC9038-C089-12DC-268F-39D067535EED}"/>
+          <p:cNvPr id="4" name="Picture 3" descr="Tables and Table Calculations | Springer Nature Link">
+            <a:extLst>
+              <a:ext uri="{FF2B5EF4-FFF2-40B4-BE49-F238E27FC236}">
+                <a16:creationId xmlns:a16="http://schemas.microsoft.com/office/drawing/2014/main" id="{7AFBCD0B-1D5F-7ED2-C7A4-8B489D53C9FB}"/>
               </a:ext>
             </a:extLst>
           </p:cNvPr>
@@ -12257,45 +12296,15 @@
         </p:nvPicPr>
         <p:blipFill>
           <a:blip r:embed="rId2"/>
+          <a:srcRect l="39574"/>
           <a:stretch>
             <a:fillRect/>
           </a:stretch>
         </p:blipFill>
         <p:spPr>
           <a:xfrm>
-            <a:off x="6096000" y="3540832"/>
-            <a:ext cx="6079087" cy="2956947"/>
-          </a:xfrm>
-          <a:prstGeom prst="rect">
-            <a:avLst/>
-          </a:prstGeom>
-        </p:spPr>
-      </p:pic>
-      <p:pic>
-        <p:nvPicPr>
-          <p:cNvPr id="5" name="Picture 4" descr="How to Count Bases &amp; Why You Should?">
-            <a:extLst>
-              <a:ext uri="{FF2B5EF4-FFF2-40B4-BE49-F238E27FC236}">
-                <a16:creationId xmlns:a16="http://schemas.microsoft.com/office/drawing/2014/main" id="{CDEF01C5-158D-6E8C-2C92-FCB1BCB4B380}"/>
-              </a:ext>
-            </a:extLst>
-          </p:cNvPr>
-          <p:cNvPicPr>
-            <a:picLocks noChangeAspect="1"/>
-          </p:cNvPicPr>
-          <p:nvPr/>
-        </p:nvPicPr>
-        <p:blipFill>
-          <a:blip r:embed="rId3"/>
-          <a:srcRect t="17919"/>
-          <a:stretch>
-            <a:fillRect/>
-          </a:stretch>
-        </p:blipFill>
-        <p:spPr>
-          <a:xfrm>
-            <a:off x="6995547" y="61955"/>
-            <a:ext cx="5105400" cy="3367045"/>
+            <a:off x="148855" y="1853514"/>
+            <a:ext cx="7070652" cy="4926866"/>
           </a:xfrm>
           <a:prstGeom prst="rect">
             <a:avLst/>
@@ -12305,7 +12314,7 @@
     </p:spTree>
     <p:extLst>
       <p:ext uri="{BB962C8B-B14F-4D97-AF65-F5344CB8AC3E}">
-        <p14:creationId xmlns:p14="http://schemas.microsoft.com/office/powerpoint/2010/main" val="1864577641"/>
+        <p14:creationId xmlns:p14="http://schemas.microsoft.com/office/powerpoint/2010/main" val="3714126364"/>
       </p:ext>
     </p:extLst>
   </p:cSld>
@@ -12316,7 +12325,7 @@
 </file>
 
 <file path=ppt/slides/slide17.xml><?xml version="1.0" encoding="utf-8"?>
-<p:sld xmlns:a="http://schemas.openxmlformats.org/drawingml/2006/main" xmlns:r="http://schemas.openxmlformats.org/officeDocument/2006/relationships" xmlns:p="http://schemas.openxmlformats.org/presentationml/2006/main" show="0">
+<p:sld xmlns:a="http://schemas.openxmlformats.org/drawingml/2006/main" xmlns:r="http://schemas.openxmlformats.org/officeDocument/2006/relationships" xmlns:p="http://schemas.openxmlformats.org/presentationml/2006/main">
   <p:cSld>
     <p:spTree>
       <p:nvGrpSpPr>
@@ -12337,7 +12346,7 @@
           <p:cNvPr id="2" name="Title 1">
             <a:extLst>
               <a:ext uri="{FF2B5EF4-FFF2-40B4-BE49-F238E27FC236}">
-                <a16:creationId xmlns:a16="http://schemas.microsoft.com/office/drawing/2014/main" id="{9FEE1A50-1ED5-624E-16C5-B09B71AB01C3}"/>
+                <a16:creationId xmlns:a16="http://schemas.microsoft.com/office/drawing/2014/main" id="{63FD5B3B-A751-5182-D937-379D3B7D4960}"/>
               </a:ext>
             </a:extLst>
           </p:cNvPr>
@@ -12353,7 +12362,10 @@
           <a:bodyPr/>
           <a:lstStyle/>
           <a:p>
-            <a:endParaRPr lang="en-US"/>
+            <a:r>
+              <a:rPr lang="en-US" dirty="0"/>
+              <a:t>Technical Stock Investing</a:t>
+            </a:r>
           </a:p>
         </p:txBody>
       </p:sp>
@@ -12362,7 +12374,7 @@
           <p:cNvPr id="3" name="Content Placeholder 2">
             <a:extLst>
               <a:ext uri="{FF2B5EF4-FFF2-40B4-BE49-F238E27FC236}">
-                <a16:creationId xmlns:a16="http://schemas.microsoft.com/office/drawing/2014/main" id="{0A236046-E343-14DE-F415-601029C4EA84}"/>
+                <a16:creationId xmlns:a16="http://schemas.microsoft.com/office/drawing/2014/main" id="{2D2C15AE-F161-3078-B108-EA76C3CA0AA5}"/>
               </a:ext>
             </a:extLst>
           </p:cNvPr>
@@ -12373,21 +12385,74 @@
             <p:ph idx="1"/>
           </p:nvPr>
         </p:nvSpPr>
-        <p:spPr/>
+        <p:spPr>
+          <a:xfrm>
+            <a:off x="5739416" y="2004291"/>
+            <a:ext cx="5461984" cy="4172672"/>
+          </a:xfrm>
+        </p:spPr>
         <p:txBody>
           <a:bodyPr/>
           <a:lstStyle/>
           <a:p>
-            <a:endParaRPr lang="en-US"/>
+            <a:r>
+              <a:rPr lang="en-US" dirty="0"/>
+              <a:t>Technical investing is based on patterns in stock price rather than value of underlying company. </a:t>
+            </a:r>
+          </a:p>
+          <a:p>
+            <a:pPr lvl="1"/>
+            <a:r>
+              <a:rPr lang="en-US" dirty="0"/>
+              <a:t>We should invest because </a:t>
+            </a:r>
+            <a:r>
+              <a:rPr lang="en-US" i="1" dirty="0"/>
+              <a:t>based on patterns in price</a:t>
+            </a:r>
+            <a:r>
+              <a:rPr lang="en-US" dirty="0"/>
+              <a:t> it appears this stock will go up/down. </a:t>
+            </a:r>
+          </a:p>
+          <a:p>
+            <a:pPr lvl="1"/>
+            <a:r>
+              <a:rPr lang="en-US" dirty="0"/>
+              <a:t>Rather than, we should invest because this is a good business that’ll grow in the future. </a:t>
+            </a:r>
+          </a:p>
+          <a:p>
+            <a:r>
+              <a:rPr lang="en-US" dirty="0"/>
+              <a:t>Based on looking at movement patterns in price. </a:t>
+            </a:r>
+          </a:p>
+          <a:p>
+            <a:pPr lvl="1"/>
+            <a:r>
+              <a:rPr lang="en-US" dirty="0"/>
+              <a:t>The core idea is that stock prices move in repeatable patterns that we can follow if we notice them. </a:t>
+            </a:r>
+          </a:p>
+          <a:p>
+            <a:pPr lvl="1"/>
+            <a:r>
+              <a:rPr lang="en-US" dirty="0"/>
+              <a:t>Fast computers have made this more powerful. </a:t>
+            </a:r>
+          </a:p>
+          <a:p>
+            <a:endParaRPr lang="en-US" dirty="0"/>
           </a:p>
         </p:txBody>
       </p:sp>
       <p:pic>
         <p:nvPicPr>
-          <p:cNvPr id="4" name="Picture 3" descr="What are the basics of chart patterns in technical analysis?">
-            <a:extLst>
-              <a:ext uri="{FF2B5EF4-FFF2-40B4-BE49-F238E27FC236}">
-                <a16:creationId xmlns:a16="http://schemas.microsoft.com/office/drawing/2014/main" id="{2E953289-773B-23CF-0909-AA8C02EEF85A}"/>
+          <p:cNvPr id="4" name="Picture 3" descr="Unlock Trading Insights with Key Stock Chart Patterns">
+            <a:extLst>
+              <a:ext uri="{FF2B5EF4-FFF2-40B4-BE49-F238E27FC236}">
+                <a16:creationId xmlns:a16="http://schemas.microsoft.com/office/drawing/2014/main" id="{752604EB-D45E-3B7F-41FF-F74FFC20A3BB}"/>
               </a:ext>
             </a:extLst>
           </p:cNvPr>
@@ -12398,15 +12463,15 @@
         </p:nvPicPr>
         <p:blipFill>
           <a:blip r:embed="rId2"/>
-          <a:srcRect t="8528" b="6405"/>
+          <a:srcRect b="10721"/>
           <a:stretch>
             <a:fillRect/>
           </a:stretch>
         </p:blipFill>
         <p:spPr>
           <a:xfrm>
-            <a:off x="0" y="0"/>
-            <a:ext cx="6474941" cy="6890614"/>
+            <a:off x="164813" y="1905699"/>
+            <a:ext cx="5574603" cy="4592080"/>
           </a:xfrm>
           <a:prstGeom prst="rect">
             <a:avLst/>
@@ -12416,7 +12481,7 @@
     </p:spTree>
     <p:extLst>
       <p:ext uri="{BB962C8B-B14F-4D97-AF65-F5344CB8AC3E}">
-        <p14:creationId xmlns:p14="http://schemas.microsoft.com/office/powerpoint/2010/main" val="1294167645"/>
+        <p14:creationId xmlns:p14="http://schemas.microsoft.com/office/powerpoint/2010/main" val="4275364864"/>
       </p:ext>
     </p:extLst>
   </p:cSld>
@@ -12448,7 +12513,7 @@
           <p:cNvPr id="2" name="Title 1">
             <a:extLst>
               <a:ext uri="{FF2B5EF4-FFF2-40B4-BE49-F238E27FC236}">
-                <a16:creationId xmlns:a16="http://schemas.microsoft.com/office/drawing/2014/main" id="{222DE790-B16F-190E-537E-B9F6A994A953}"/>
+                <a16:creationId xmlns:a16="http://schemas.microsoft.com/office/drawing/2014/main" id="{FA81DE3C-9792-FBA1-115E-49BF23468997}"/>
               </a:ext>
             </a:extLst>
           </p:cNvPr>
@@ -12459,19 +12524,14 @@
             <p:ph type="title"/>
           </p:nvPr>
         </p:nvSpPr>
-        <p:spPr>
-          <a:xfrm>
-            <a:off x="6759146" y="360221"/>
-            <a:ext cx="4442254" cy="1330468"/>
-          </a:xfrm>
-        </p:spPr>
+        <p:spPr/>
         <p:txBody>
           <a:bodyPr/>
           <a:lstStyle/>
           <a:p>
             <a:r>
               <a:rPr lang="en-US" dirty="0"/>
-              <a:t>Patterns</a:t>
+              <a:t>Patterns in Prices</a:t>
             </a:r>
           </a:p>
         </p:txBody>
@@ -12481,7 +12541,7 @@
           <p:cNvPr id="3" name="Content Placeholder 2">
             <a:extLst>
               <a:ext uri="{FF2B5EF4-FFF2-40B4-BE49-F238E27FC236}">
-                <a16:creationId xmlns:a16="http://schemas.microsoft.com/office/drawing/2014/main" id="{0BDEA5FA-01AF-B57A-8566-8D504771D3B3}"/>
+                <a16:creationId xmlns:a16="http://schemas.microsoft.com/office/drawing/2014/main" id="{AEA77AA2-69DE-12EE-6EE1-DF7BE5CAE0F6}"/>
               </a:ext>
             </a:extLst>
           </p:cNvPr>
@@ -12494,8 +12554,8 @@
         </p:nvSpPr>
         <p:spPr>
           <a:xfrm>
-            <a:off x="6759144" y="2004291"/>
-            <a:ext cx="4442255" cy="4172672"/>
+            <a:off x="685800" y="2004291"/>
+            <a:ext cx="5410200" cy="4172672"/>
           </a:xfrm>
         </p:spPr>
         <p:txBody>
@@ -12504,35 +12564,23 @@
           <a:p>
             <a:r>
               <a:rPr lang="en-US" dirty="0"/>
-              <a:t>There are many existing patterns. </a:t>
-            </a:r>
-          </a:p>
-          <a:p>
-            <a:r>
-              <a:rPr lang="en-US" dirty="0"/>
-              <a:t>These are not certainties. </a:t>
-            </a:r>
-          </a:p>
-          <a:p>
-            <a:r>
-              <a:rPr lang="en-US" dirty="0"/>
-              <a:t>Computers can allow us to check all stocks for all patterns very quickly. </a:t>
-            </a:r>
-          </a:p>
-          <a:p>
-            <a:r>
-              <a:rPr lang="en-US" dirty="0"/>
-              <a:t>Can base decisions strictly on technical data or as a factor with ”normal” data. </a:t>
+              <a:t>There are several patterns that people have noticed in how stock prices move. </a:t>
+            </a:r>
+          </a:p>
+          <a:p>
+            <a:r>
+              <a:rPr lang="en-US" dirty="0"/>
+              <a:t>Investors look for stocks at the start of the pattern, and invest assuming the stock may follow that pattern further. </a:t>
             </a:r>
           </a:p>
         </p:txBody>
       </p:sp>
       <p:pic>
         <p:nvPicPr>
-          <p:cNvPr id="4" name="Picture 3" descr="Common stock chart patterns for trading decisions">
-            <a:extLst>
-              <a:ext uri="{FF2B5EF4-FFF2-40B4-BE49-F238E27FC236}">
-                <a16:creationId xmlns:a16="http://schemas.microsoft.com/office/drawing/2014/main" id="{1867EDF7-DF42-3E6E-3C47-8F850070E247}"/>
+          <p:cNvPr id="4" name="Picture 3" descr="10 important stock chart analysis patterns | CMC Markets">
+            <a:extLst>
+              <a:ext uri="{FF2B5EF4-FFF2-40B4-BE49-F238E27FC236}">
+                <a16:creationId xmlns:a16="http://schemas.microsoft.com/office/drawing/2014/main" id="{C8AC9038-C089-12DC-268F-39D067535EED}"/>
               </a:ext>
             </a:extLst>
           </p:cNvPr>
@@ -12543,15 +12591,45 @@
         </p:nvPicPr>
         <p:blipFill>
           <a:blip r:embed="rId2"/>
-          <a:srcRect t="11631" b="20238"/>
           <a:stretch>
             <a:fillRect/>
           </a:stretch>
         </p:blipFill>
         <p:spPr>
           <a:xfrm>
-            <a:off x="0" y="0"/>
-            <a:ext cx="6759146" cy="6816315"/>
+            <a:off x="6096000" y="3540832"/>
+            <a:ext cx="6079087" cy="2956947"/>
+          </a:xfrm>
+          <a:prstGeom prst="rect">
+            <a:avLst/>
+          </a:prstGeom>
+        </p:spPr>
+      </p:pic>
+      <p:pic>
+        <p:nvPicPr>
+          <p:cNvPr id="5" name="Picture 4" descr="How to Count Bases &amp; Why You Should?">
+            <a:extLst>
+              <a:ext uri="{FF2B5EF4-FFF2-40B4-BE49-F238E27FC236}">
+                <a16:creationId xmlns:a16="http://schemas.microsoft.com/office/drawing/2014/main" id="{CDEF01C5-158D-6E8C-2C92-FCB1BCB4B380}"/>
+              </a:ext>
+            </a:extLst>
+          </p:cNvPr>
+          <p:cNvPicPr>
+            <a:picLocks noChangeAspect="1"/>
+          </p:cNvPicPr>
+          <p:nvPr/>
+        </p:nvPicPr>
+        <p:blipFill>
+          <a:blip r:embed="rId3"/>
+          <a:srcRect t="17919"/>
+          <a:stretch>
+            <a:fillRect/>
+          </a:stretch>
+        </p:blipFill>
+        <p:spPr>
+          <a:xfrm>
+            <a:off x="6995547" y="61955"/>
+            <a:ext cx="5105400" cy="3367045"/>
           </a:xfrm>
           <a:prstGeom prst="rect">
             <a:avLst/>
@@ -12561,7 +12639,7 @@
     </p:spTree>
     <p:extLst>
       <p:ext uri="{BB962C8B-B14F-4D97-AF65-F5344CB8AC3E}">
-        <p14:creationId xmlns:p14="http://schemas.microsoft.com/office/powerpoint/2010/main" val="4211399631"/>
+        <p14:creationId xmlns:p14="http://schemas.microsoft.com/office/powerpoint/2010/main" val="1864577641"/>
       </p:ext>
     </p:extLst>
   </p:cSld>
@@ -12572,7 +12650,7 @@
 </file>
 
 <file path=ppt/slides/slide19.xml><?xml version="1.0" encoding="utf-8"?>
-<p:sld xmlns:a="http://schemas.openxmlformats.org/drawingml/2006/main" xmlns:r="http://schemas.openxmlformats.org/officeDocument/2006/relationships" xmlns:p="http://schemas.openxmlformats.org/presentationml/2006/main">
+<p:sld xmlns:a="http://schemas.openxmlformats.org/drawingml/2006/main" xmlns:r="http://schemas.openxmlformats.org/officeDocument/2006/relationships" xmlns:p="http://schemas.openxmlformats.org/presentationml/2006/main" show="0">
   <p:cSld>
     <p:spTree>
       <p:nvGrpSpPr>
@@ -12593,7 +12671,7 @@
           <p:cNvPr id="2" name="Title 1">
             <a:extLst>
               <a:ext uri="{FF2B5EF4-FFF2-40B4-BE49-F238E27FC236}">
-                <a16:creationId xmlns:a16="http://schemas.microsoft.com/office/drawing/2014/main" id="{11B6E685-0BEE-1098-604A-4DB749211F25}"/>
+                <a16:creationId xmlns:a16="http://schemas.microsoft.com/office/drawing/2014/main" id="{9FEE1A50-1ED5-624E-16C5-B09B71AB01C3}"/>
               </a:ext>
             </a:extLst>
           </p:cNvPr>
@@ -12609,10 +12687,7 @@
           <a:bodyPr/>
           <a:lstStyle/>
           <a:p>
-            <a:r>
-              <a:rPr lang="en-US" dirty="0"/>
-              <a:t>Even Smarter Versions</a:t>
-            </a:r>
+            <a:endParaRPr lang="en-US"/>
           </a:p>
         </p:txBody>
       </p:sp>
@@ -12621,7 +12696,7 @@
           <p:cNvPr id="3" name="Content Placeholder 2">
             <a:extLst>
               <a:ext uri="{FF2B5EF4-FFF2-40B4-BE49-F238E27FC236}">
-                <a16:creationId xmlns:a16="http://schemas.microsoft.com/office/drawing/2014/main" id="{40CB77F6-EC1A-B5BF-C185-E72C523E771E}"/>
+                <a16:creationId xmlns:a16="http://schemas.microsoft.com/office/drawing/2014/main" id="{0A236046-E343-14DE-F415-601029C4EA84}"/>
               </a:ext>
             </a:extLst>
           </p:cNvPr>
@@ -12632,74 +12707,21 @@
             <p:ph idx="1"/>
           </p:nvPr>
         </p:nvSpPr>
-        <p:spPr>
-          <a:xfrm>
-            <a:off x="98853" y="1860698"/>
-            <a:ext cx="5393959" cy="4637081"/>
-          </a:xfrm>
-        </p:spPr>
+        <p:spPr/>
         <p:txBody>
           <a:bodyPr/>
           <a:lstStyle/>
           <a:p>
-            <a:r>
-              <a:rPr lang="en-US" dirty="0"/>
-              <a:t>Modern ML is more powerful. </a:t>
-            </a:r>
-          </a:p>
-          <a:p>
-            <a:r>
-              <a:rPr lang="en-US" dirty="0"/>
-              <a:t>Can feed model all data. </a:t>
-            </a:r>
-          </a:p>
-          <a:p>
-            <a:r>
-              <a:rPr lang="en-US" dirty="0"/>
-              <a:t>Model will learn more subtle patterns in data. </a:t>
-            </a:r>
-          </a:p>
-          <a:p>
-            <a:r>
-              <a:rPr lang="en-US" dirty="0"/>
-              <a:t>Can screen all stocks. </a:t>
-            </a:r>
-          </a:p>
-          <a:p>
-            <a:r>
-              <a:rPr lang="en-US" dirty="0"/>
-              <a:t>Trained by making “old” preds. </a:t>
-            </a:r>
-          </a:p>
-          <a:p>
-            <a:pPr lvl="1"/>
-            <a:r>
-              <a:rPr lang="en-US" dirty="0"/>
-              <a:t>Using data before today, predict today’s prices. </a:t>
-            </a:r>
-          </a:p>
-          <a:p>
-            <a:pPr lvl="1"/>
-            <a:r>
-              <a:rPr lang="en-US" dirty="0"/>
-              <a:t>What is error in each prediction?</a:t>
-            </a:r>
-          </a:p>
-          <a:p>
-            <a:pPr lvl="1"/>
-            <a:r>
-              <a:rPr lang="en-US" dirty="0"/>
-              <a:t>Repeat and adjust to lower – models have billions of parameters (numbers) that can be tuned. </a:t>
-            </a:r>
+            <a:endParaRPr lang="en-US"/>
           </a:p>
         </p:txBody>
       </p:sp>
       <p:pic>
         <p:nvPicPr>
-          <p:cNvPr id="5" name="Picture 4" descr="PDF] An Artificial Neural Network-based Stock Trading System Using Technical  Analysis and Big Data Framework | Semantic Scholar">
-            <a:extLst>
-              <a:ext uri="{FF2B5EF4-FFF2-40B4-BE49-F238E27FC236}">
-                <a16:creationId xmlns:a16="http://schemas.microsoft.com/office/drawing/2014/main" id="{E79086CC-BFA5-9083-EE5A-594FB6D93BBD}"/>
+          <p:cNvPr id="4" name="Picture 3" descr="What are the basics of chart patterns in technical analysis?">
+            <a:extLst>
+              <a:ext uri="{FF2B5EF4-FFF2-40B4-BE49-F238E27FC236}">
+                <a16:creationId xmlns:a16="http://schemas.microsoft.com/office/drawing/2014/main" id="{2E953289-773B-23CF-0909-AA8C02EEF85A}"/>
               </a:ext>
             </a:extLst>
           </p:cNvPr>
@@ -12710,14 +12732,15 @@
         </p:nvPicPr>
         <p:blipFill>
           <a:blip r:embed="rId2"/>
+          <a:srcRect t="8528" b="6405"/>
           <a:stretch>
             <a:fillRect/>
           </a:stretch>
         </p:blipFill>
         <p:spPr>
           <a:xfrm>
-            <a:off x="5492813" y="2224132"/>
-            <a:ext cx="6490080" cy="3400491"/>
+            <a:off x="0" y="0"/>
+            <a:ext cx="6474941" cy="6890614"/>
           </a:xfrm>
           <a:prstGeom prst="rect">
             <a:avLst/>
@@ -12727,7 +12750,7 @@
     </p:spTree>
     <p:extLst>
       <p:ext uri="{BB962C8B-B14F-4D97-AF65-F5344CB8AC3E}">
-        <p14:creationId xmlns:p14="http://schemas.microsoft.com/office/powerpoint/2010/main" val="815656362"/>
+        <p14:creationId xmlns:p14="http://schemas.microsoft.com/office/powerpoint/2010/main" val="1294167645"/>
       </p:ext>
     </p:extLst>
   </p:cSld>
@@ -12843,7 +12866,7 @@
           <a:p>
             <a:r>
               <a:rPr lang="en-US" dirty="0"/>
-              <a:t>Next time – spatial joining. </a:t>
+              <a:t>Next time – spatial joining and table calculations (fixed) for a reason. </a:t>
             </a:r>
           </a:p>
           <a:p>
@@ -12904,6 +12927,317 @@
           <p:cNvPr id="2" name="Title 1">
             <a:extLst>
               <a:ext uri="{FF2B5EF4-FFF2-40B4-BE49-F238E27FC236}">
+                <a16:creationId xmlns:a16="http://schemas.microsoft.com/office/drawing/2014/main" id="{222DE790-B16F-190E-537E-B9F6A994A953}"/>
+              </a:ext>
+            </a:extLst>
+          </p:cNvPr>
+          <p:cNvSpPr>
+            <a:spLocks noGrp="1"/>
+          </p:cNvSpPr>
+          <p:nvPr>
+            <p:ph type="title"/>
+          </p:nvPr>
+        </p:nvSpPr>
+        <p:spPr>
+          <a:xfrm>
+            <a:off x="6759146" y="360221"/>
+            <a:ext cx="4442254" cy="1330468"/>
+          </a:xfrm>
+        </p:spPr>
+        <p:txBody>
+          <a:bodyPr/>
+          <a:lstStyle/>
+          <a:p>
+            <a:r>
+              <a:rPr lang="en-US" dirty="0"/>
+              <a:t>Patterns</a:t>
+            </a:r>
+          </a:p>
+        </p:txBody>
+      </p:sp>
+      <p:sp>
+        <p:nvSpPr>
+          <p:cNvPr id="3" name="Content Placeholder 2">
+            <a:extLst>
+              <a:ext uri="{FF2B5EF4-FFF2-40B4-BE49-F238E27FC236}">
+                <a16:creationId xmlns:a16="http://schemas.microsoft.com/office/drawing/2014/main" id="{0BDEA5FA-01AF-B57A-8566-8D504771D3B3}"/>
+              </a:ext>
+            </a:extLst>
+          </p:cNvPr>
+          <p:cNvSpPr>
+            <a:spLocks noGrp="1"/>
+          </p:cNvSpPr>
+          <p:nvPr>
+            <p:ph idx="1"/>
+          </p:nvPr>
+        </p:nvSpPr>
+        <p:spPr>
+          <a:xfrm>
+            <a:off x="6759144" y="2004291"/>
+            <a:ext cx="4442255" cy="4172672"/>
+          </a:xfrm>
+        </p:spPr>
+        <p:txBody>
+          <a:bodyPr/>
+          <a:lstStyle/>
+          <a:p>
+            <a:r>
+              <a:rPr lang="en-US" dirty="0"/>
+              <a:t>There are many existing patterns. </a:t>
+            </a:r>
+          </a:p>
+          <a:p>
+            <a:r>
+              <a:rPr lang="en-US" dirty="0"/>
+              <a:t>These are not certainties. </a:t>
+            </a:r>
+          </a:p>
+          <a:p>
+            <a:r>
+              <a:rPr lang="en-US" dirty="0"/>
+              <a:t>Computers can allow us to check all stocks for all patterns very quickly. </a:t>
+            </a:r>
+          </a:p>
+          <a:p>
+            <a:r>
+              <a:rPr lang="en-US" dirty="0"/>
+              <a:t>Can base decisions strictly on technical data or as a factor with ”normal” data. </a:t>
+            </a:r>
+          </a:p>
+        </p:txBody>
+      </p:sp>
+      <p:pic>
+        <p:nvPicPr>
+          <p:cNvPr id="4" name="Picture 3" descr="Common stock chart patterns for trading decisions">
+            <a:extLst>
+              <a:ext uri="{FF2B5EF4-FFF2-40B4-BE49-F238E27FC236}">
+                <a16:creationId xmlns:a16="http://schemas.microsoft.com/office/drawing/2014/main" id="{1867EDF7-DF42-3E6E-3C47-8F850070E247}"/>
+              </a:ext>
+            </a:extLst>
+          </p:cNvPr>
+          <p:cNvPicPr>
+            <a:picLocks noChangeAspect="1"/>
+          </p:cNvPicPr>
+          <p:nvPr/>
+        </p:nvPicPr>
+        <p:blipFill>
+          <a:blip r:embed="rId2"/>
+          <a:srcRect t="11631" b="20238"/>
+          <a:stretch>
+            <a:fillRect/>
+          </a:stretch>
+        </p:blipFill>
+        <p:spPr>
+          <a:xfrm>
+            <a:off x="0" y="0"/>
+            <a:ext cx="6759146" cy="6816315"/>
+          </a:xfrm>
+          <a:prstGeom prst="rect">
+            <a:avLst/>
+          </a:prstGeom>
+        </p:spPr>
+      </p:pic>
+    </p:spTree>
+    <p:extLst>
+      <p:ext uri="{BB962C8B-B14F-4D97-AF65-F5344CB8AC3E}">
+        <p14:creationId xmlns:p14="http://schemas.microsoft.com/office/powerpoint/2010/main" val="4211399631"/>
+      </p:ext>
+    </p:extLst>
+  </p:cSld>
+  <p:clrMapOvr>
+    <a:masterClrMapping/>
+  </p:clrMapOvr>
+</p:sld>
+</file>
+
+<file path=ppt/slides/slide21.xml><?xml version="1.0" encoding="utf-8"?>
+<p:sld xmlns:a="http://schemas.openxmlformats.org/drawingml/2006/main" xmlns:r="http://schemas.openxmlformats.org/officeDocument/2006/relationships" xmlns:p="http://schemas.openxmlformats.org/presentationml/2006/main">
+  <p:cSld>
+    <p:spTree>
+      <p:nvGrpSpPr>
+        <p:cNvPr id="1" name=""/>
+        <p:cNvGrpSpPr/>
+        <p:nvPr/>
+      </p:nvGrpSpPr>
+      <p:grpSpPr>
+        <a:xfrm>
+          <a:off x="0" y="0"/>
+          <a:ext cx="0" cy="0"/>
+          <a:chOff x="0" y="0"/>
+          <a:chExt cx="0" cy="0"/>
+        </a:xfrm>
+      </p:grpSpPr>
+      <p:sp>
+        <p:nvSpPr>
+          <p:cNvPr id="2" name="Title 1">
+            <a:extLst>
+              <a:ext uri="{FF2B5EF4-FFF2-40B4-BE49-F238E27FC236}">
+                <a16:creationId xmlns:a16="http://schemas.microsoft.com/office/drawing/2014/main" id="{11B6E685-0BEE-1098-604A-4DB749211F25}"/>
+              </a:ext>
+            </a:extLst>
+          </p:cNvPr>
+          <p:cNvSpPr>
+            <a:spLocks noGrp="1"/>
+          </p:cNvSpPr>
+          <p:nvPr>
+            <p:ph type="title"/>
+          </p:nvPr>
+        </p:nvSpPr>
+        <p:spPr/>
+        <p:txBody>
+          <a:bodyPr/>
+          <a:lstStyle/>
+          <a:p>
+            <a:r>
+              <a:rPr lang="en-US" dirty="0"/>
+              <a:t>Even Smarter Versions</a:t>
+            </a:r>
+          </a:p>
+        </p:txBody>
+      </p:sp>
+      <p:sp>
+        <p:nvSpPr>
+          <p:cNvPr id="3" name="Content Placeholder 2">
+            <a:extLst>
+              <a:ext uri="{FF2B5EF4-FFF2-40B4-BE49-F238E27FC236}">
+                <a16:creationId xmlns:a16="http://schemas.microsoft.com/office/drawing/2014/main" id="{40CB77F6-EC1A-B5BF-C185-E72C523E771E}"/>
+              </a:ext>
+            </a:extLst>
+          </p:cNvPr>
+          <p:cNvSpPr>
+            <a:spLocks noGrp="1"/>
+          </p:cNvSpPr>
+          <p:nvPr>
+            <p:ph idx="1"/>
+          </p:nvPr>
+        </p:nvSpPr>
+        <p:spPr>
+          <a:xfrm>
+            <a:off x="98853" y="1860698"/>
+            <a:ext cx="5393959" cy="4637081"/>
+          </a:xfrm>
+        </p:spPr>
+        <p:txBody>
+          <a:bodyPr/>
+          <a:lstStyle/>
+          <a:p>
+            <a:r>
+              <a:rPr lang="en-US" dirty="0"/>
+              <a:t>Modern ML is more powerful. </a:t>
+            </a:r>
+          </a:p>
+          <a:p>
+            <a:r>
+              <a:rPr lang="en-US" dirty="0"/>
+              <a:t>Can feed model all data. </a:t>
+            </a:r>
+          </a:p>
+          <a:p>
+            <a:r>
+              <a:rPr lang="en-US" dirty="0"/>
+              <a:t>Model will learn more subtle patterns in data. </a:t>
+            </a:r>
+          </a:p>
+          <a:p>
+            <a:r>
+              <a:rPr lang="en-US" dirty="0"/>
+              <a:t>Can screen all stocks. </a:t>
+            </a:r>
+          </a:p>
+          <a:p>
+            <a:r>
+              <a:rPr lang="en-US" dirty="0"/>
+              <a:t>Trained by making “old” preds. </a:t>
+            </a:r>
+          </a:p>
+          <a:p>
+            <a:pPr lvl="1"/>
+            <a:r>
+              <a:rPr lang="en-US" dirty="0"/>
+              <a:t>Using data before today, predict today’s prices. </a:t>
+            </a:r>
+          </a:p>
+          <a:p>
+            <a:pPr lvl="1"/>
+            <a:r>
+              <a:rPr lang="en-US" dirty="0"/>
+              <a:t>What is error in each prediction?</a:t>
+            </a:r>
+          </a:p>
+          <a:p>
+            <a:pPr lvl="1"/>
+            <a:r>
+              <a:rPr lang="en-US" dirty="0"/>
+              <a:t>Repeat and adjust to lower – models have billions of parameters (numbers) that can be tuned. </a:t>
+            </a:r>
+          </a:p>
+        </p:txBody>
+      </p:sp>
+      <p:pic>
+        <p:nvPicPr>
+          <p:cNvPr id="5" name="Picture 4" descr="PDF] An Artificial Neural Network-based Stock Trading System Using Technical  Analysis and Big Data Framework | Semantic Scholar">
+            <a:extLst>
+              <a:ext uri="{FF2B5EF4-FFF2-40B4-BE49-F238E27FC236}">
+                <a16:creationId xmlns:a16="http://schemas.microsoft.com/office/drawing/2014/main" id="{E79086CC-BFA5-9083-EE5A-594FB6D93BBD}"/>
+              </a:ext>
+            </a:extLst>
+          </p:cNvPr>
+          <p:cNvPicPr>
+            <a:picLocks noChangeAspect="1"/>
+          </p:cNvPicPr>
+          <p:nvPr/>
+        </p:nvPicPr>
+        <p:blipFill>
+          <a:blip r:embed="rId2"/>
+          <a:stretch>
+            <a:fillRect/>
+          </a:stretch>
+        </p:blipFill>
+        <p:spPr>
+          <a:xfrm>
+            <a:off x="5492813" y="2224132"/>
+            <a:ext cx="6490080" cy="3400491"/>
+          </a:xfrm>
+          <a:prstGeom prst="rect">
+            <a:avLst/>
+          </a:prstGeom>
+        </p:spPr>
+      </p:pic>
+    </p:spTree>
+    <p:extLst>
+      <p:ext uri="{BB962C8B-B14F-4D97-AF65-F5344CB8AC3E}">
+        <p14:creationId xmlns:p14="http://schemas.microsoft.com/office/powerpoint/2010/main" val="815656362"/>
+      </p:ext>
+    </p:extLst>
+  </p:cSld>
+  <p:clrMapOvr>
+    <a:masterClrMapping/>
+  </p:clrMapOvr>
+</p:sld>
+</file>
+
+<file path=ppt/slides/slide22.xml><?xml version="1.0" encoding="utf-8"?>
+<p:sld xmlns:a="http://schemas.openxmlformats.org/drawingml/2006/main" xmlns:r="http://schemas.openxmlformats.org/officeDocument/2006/relationships" xmlns:p="http://schemas.openxmlformats.org/presentationml/2006/main">
+  <p:cSld>
+    <p:spTree>
+      <p:nvGrpSpPr>
+        <p:cNvPr id="1" name=""/>
+        <p:cNvGrpSpPr/>
+        <p:nvPr/>
+      </p:nvGrpSpPr>
+      <p:grpSpPr>
+        <a:xfrm>
+          <a:off x="0" y="0"/>
+          <a:ext cx="0" cy="0"/>
+          <a:chOff x="0" y="0"/>
+          <a:chExt cx="0" cy="0"/>
+        </a:xfrm>
+      </p:grpSpPr>
+      <p:sp>
+        <p:nvSpPr>
+          <p:cNvPr id="2" name="Title 1">
+            <a:extLst>
+              <a:ext uri="{FF2B5EF4-FFF2-40B4-BE49-F238E27FC236}">
                 <a16:creationId xmlns:a16="http://schemas.microsoft.com/office/drawing/2014/main" id="{023137DE-6DF7-C6CD-E966-D8847DB23C4A}"/>
               </a:ext>
             </a:extLst>
@@ -13039,7 +13373,7 @@
 </p:sld>
 </file>
 
-<file path=ppt/slides/slide21.xml><?xml version="1.0" encoding="utf-8"?>
+<file path=ppt/slides/slide23.xml><?xml version="1.0" encoding="utf-8"?>
 <p:sld xmlns:a="http://schemas.openxmlformats.org/drawingml/2006/main" xmlns:r="http://schemas.openxmlformats.org/officeDocument/2006/relationships" xmlns:p="http://schemas.openxmlformats.org/presentationml/2006/main">
   <p:cSld>
     <p:spTree>
@@ -13364,13 +13698,14 @@
             <a:pPr lvl="1"/>
             <a:r>
               <a:rPr lang="en-US" b="1" dirty="0"/>
-              <a:t>You will probably need to learn something new as it comes up, as </a:t>
-            </a:r>
-            <a:r>
-              <a:rPr lang="en-US" b="1"/>
-              <a:t>you build. </a:t>
-            </a:r>
-            <a:endParaRPr lang="en-US" b="1" dirty="0"/>
+              <a:t>You will probably need to learn something new as it comes up, as you build. </a:t>
+            </a:r>
+          </a:p>
+          <a:p>
+            <a:r>
+              <a:rPr lang="en-US" b="1" dirty="0"/>
+              <a:t>You can probably do a substantial portion of it at the ends of periods, post examples. </a:t>
+            </a:r>
           </a:p>
         </p:txBody>
       </p:sp>
@@ -13450,8 +13785,8 @@
         </p:nvSpPr>
         <p:spPr>
           <a:xfrm>
-            <a:off x="838200" y="2061469"/>
-            <a:ext cx="4999560" cy="4114801"/>
+            <a:off x="350874" y="1850065"/>
+            <a:ext cx="5486886" cy="4326205"/>
           </a:xfrm>
         </p:spPr>
         <p:txBody>
@@ -13486,6 +13821,12 @@
           <a:p>
             <a:r>
               <a:rPr lang="en-US" dirty="0"/>
+              <a:t>Can be based on data – e.g. list of values. </a:t>
+            </a:r>
+          </a:p>
+          <a:p>
+            <a:r>
+              <a:rPr lang="en-US" dirty="0"/>
               <a:t>Once captured, the parameter values are usable just like any other variable. </a:t>
             </a:r>
           </a:p>
@@ -13501,6 +13842,13 @@
             <a:r>
               <a:rPr lang="en-US" dirty="0"/>
               <a:t>Can be used in a calculation. </a:t>
+            </a:r>
+          </a:p>
+          <a:p>
+            <a:pPr lvl="1"/>
+            <a:r>
+              <a:rPr lang="en-US" dirty="0"/>
+              <a:t>Compare everything to this item. </a:t>
             </a:r>
           </a:p>
           <a:p>
@@ -13613,7 +13961,12 @@
             <p:ph idx="1"/>
           </p:nvPr>
         </p:nvSpPr>
-        <p:spPr/>
+        <p:spPr>
+          <a:xfrm>
+            <a:off x="685800" y="1839433"/>
+            <a:ext cx="10515600" cy="4337530"/>
+          </a:xfrm>
+        </p:spPr>
         <p:txBody>
           <a:bodyPr/>
           <a:lstStyle/>
@@ -13648,6 +14001,21 @@
             <a:r>
               <a:rPr lang="en-US" dirty="0"/>
               <a:t>Interactive elements – base calculations off some user inputted value. </a:t>
+            </a:r>
+          </a:p>
+          <a:p>
+            <a:pPr lvl="1"/>
+            <a:r>
+              <a:rPr lang="en-US" dirty="0"/>
+              <a:t>Change “focus” – select a base item and compare things relative it. (e.g. investing vs </a:t>
+            </a:r>
+            <a:r>
+              <a:rPr lang="en-US" dirty="0" err="1"/>
+              <a:t>s&amp;p</a:t>
+            </a:r>
+            <a:r>
+              <a:rPr lang="en-US" dirty="0"/>
+              <a:t> 500)</a:t>
             </a:r>
           </a:p>
           <a:p>
@@ -14041,7 +14409,7 @@
         <p:spPr>
           <a:xfrm>
             <a:off x="5703480" y="2004291"/>
-            <a:ext cx="6195239" cy="4172672"/>
+            <a:ext cx="6488520" cy="4172672"/>
           </a:xfrm>
         </p:spPr>
         <p:txBody>
@@ -14106,6 +14474,12 @@
             <a:r>
               <a:rPr lang="en-US" dirty="0"/>
               <a:t>Technical investing. </a:t>
+            </a:r>
+          </a:p>
+          <a:p>
+            <a:r>
+              <a:rPr lang="en-US" dirty="0"/>
+              <a:t>Limits can be from outside (e.g. temp limit) or based on data.</a:t>
             </a:r>
           </a:p>
         </p:txBody>
@@ -14132,8 +14506,8 @@
         </p:blipFill>
         <p:spPr>
           <a:xfrm>
-            <a:off x="293281" y="1944327"/>
-            <a:ext cx="5410200" cy="4292600"/>
+            <a:off x="159488" y="1838172"/>
+            <a:ext cx="5543993" cy="4398755"/>
           </a:xfrm>
           <a:prstGeom prst="rect">
             <a:avLst/>
@@ -14175,7 +14549,7 @@
           <p:cNvPr id="2" name="Title 1">
             <a:extLst>
               <a:ext uri="{FF2B5EF4-FFF2-40B4-BE49-F238E27FC236}">
-                <a16:creationId xmlns:a16="http://schemas.microsoft.com/office/drawing/2014/main" id="{5402F61E-C7B6-0DD9-D2DA-7076590C1542}"/>
+                <a16:creationId xmlns:a16="http://schemas.microsoft.com/office/drawing/2014/main" id="{C3F64670-42C6-054A-DF5B-04CD5269A998}"/>
               </a:ext>
             </a:extLst>
           </p:cNvPr>
@@ -14193,7 +14567,7 @@
           <a:p>
             <a:r>
               <a:rPr lang="en-US" dirty="0"/>
-              <a:t>Waterfall (Candlestick) Chart</a:t>
+              <a:t>Control your Tableau Charts</a:t>
             </a:r>
           </a:p>
         </p:txBody>
@@ -14203,7 +14577,7 @@
           <p:cNvPr id="3" name="Content Placeholder 2">
             <a:extLst>
               <a:ext uri="{FF2B5EF4-FFF2-40B4-BE49-F238E27FC236}">
-                <a16:creationId xmlns:a16="http://schemas.microsoft.com/office/drawing/2014/main" id="{FAA2D161-CBC3-29B3-3C0C-10AFE6D394E6}"/>
+                <a16:creationId xmlns:a16="http://schemas.microsoft.com/office/drawing/2014/main" id="{A15F86F3-E169-38C9-1CFC-424BCEAD7199}"/>
               </a:ext>
             </a:extLst>
           </p:cNvPr>
@@ -14217,7 +14591,7 @@
         <p:spPr>
           <a:xfrm>
             <a:off x="685800" y="2004291"/>
-            <a:ext cx="4919921" cy="4172672"/>
+            <a:ext cx="5058143" cy="4172672"/>
           </a:xfrm>
         </p:spPr>
         <p:txBody>
@@ -14226,64 +14600,42 @@
           <a:p>
             <a:r>
               <a:rPr lang="en-US" dirty="0"/>
-              <a:t>Waterfall charts show two things:</a:t>
+              <a:t>We can try using control charts with parameters. </a:t>
+            </a:r>
+          </a:p>
+          <a:p>
+            <a:r>
+              <a:rPr lang="en-US" dirty="0"/>
+              <a:t>Use stock price for data. </a:t>
+            </a:r>
+          </a:p>
+          <a:p>
+            <a:r>
+              <a:rPr lang="en-US" dirty="0"/>
+              <a:t>Use a parameter to control upper/lower limits. </a:t>
+            </a:r>
+          </a:p>
+          <a:p>
+            <a:r>
+              <a:rPr lang="en-US" dirty="0"/>
+              <a:t>Base other stuff, like color coding, off of this. </a:t>
             </a:r>
           </a:p>
           <a:p>
             <a:pPr lvl="1"/>
             <a:r>
               <a:rPr lang="en-US" dirty="0"/>
-              <a:t>A value, similar to a line chart. </a:t>
-            </a:r>
-          </a:p>
-          <a:p>
-            <a:pPr lvl="1"/>
-            <a:r>
-              <a:rPr lang="en-US" dirty="0"/>
-              <a:t>The per period (e.g. daily) change. </a:t>
-            </a:r>
-          </a:p>
-          <a:p>
-            <a:r>
-              <a:rPr lang="en-US" dirty="0"/>
-              <a:t>Good application of data density. </a:t>
-            </a:r>
-          </a:p>
-          <a:p>
-            <a:pPr lvl="1"/>
-            <a:r>
-              <a:rPr lang="en-US" dirty="0"/>
-              <a:t>Change is added to a ”regular” line chart. </a:t>
-            </a:r>
-          </a:p>
-          <a:p>
-            <a:r>
-              <a:rPr lang="en-US" dirty="0"/>
-              <a:t>Commonly seen in:</a:t>
-            </a:r>
-          </a:p>
-          <a:p>
-            <a:pPr lvl="1"/>
-            <a:r>
-              <a:rPr lang="en-US" dirty="0"/>
-              <a:t>Stock price quotes. </a:t>
-            </a:r>
-          </a:p>
-          <a:p>
-            <a:pPr lvl="1"/>
-            <a:r>
-              <a:rPr lang="en-US" dirty="0"/>
-              <a:t>Summary of things like sales/profit totals. </a:t>
+              <a:t>We can detect when limits are crossed, based on the limits that are configurable by user. </a:t>
             </a:r>
           </a:p>
         </p:txBody>
       </p:sp>
       <p:pic>
         <p:nvPicPr>
-          <p:cNvPr id="4" name="Picture 3" descr="Build Insightful Waterfall Charts in PowerPoint - Ampler">
-            <a:extLst>
-              <a:ext uri="{FF2B5EF4-FFF2-40B4-BE49-F238E27FC236}">
-                <a16:creationId xmlns:a16="http://schemas.microsoft.com/office/drawing/2014/main" id="{0049D6A1-47F6-2E35-0C63-861953723D56}"/>
+          <p:cNvPr id="4" name="Picture 3" descr="How to create control charts in Tableau">
+            <a:extLst>
+              <a:ext uri="{FF2B5EF4-FFF2-40B4-BE49-F238E27FC236}">
+                <a16:creationId xmlns:a16="http://schemas.microsoft.com/office/drawing/2014/main" id="{6A1B47D9-87C5-8331-E870-C6ECACD0F95D}"/>
               </a:ext>
             </a:extLst>
           </p:cNvPr>
@@ -14300,8 +14652,8 @@
         </p:blipFill>
         <p:spPr>
           <a:xfrm>
-            <a:off x="5605721" y="2004291"/>
-            <a:ext cx="6502400" cy="3556000"/>
+            <a:off x="5743943" y="2307265"/>
+            <a:ext cx="6277935" cy="3228652"/>
           </a:xfrm>
           <a:prstGeom prst="rect">
             <a:avLst/>
@@ -14311,7 +14663,7 @@
     </p:spTree>
     <p:extLst>
       <p:ext uri="{BB962C8B-B14F-4D97-AF65-F5344CB8AC3E}">
-        <p14:creationId xmlns:p14="http://schemas.microsoft.com/office/powerpoint/2010/main" val="943217934"/>
+        <p14:creationId xmlns:p14="http://schemas.microsoft.com/office/powerpoint/2010/main" val="3740121248"/>
       </p:ext>
     </p:extLst>
   </p:cSld>
